--- a/lecture_pptx/out/s12/ワーク01_講師用.pptx
+++ b/lecture_pptx/out/s12/ワーク01_講師用.pptx
@@ -1275,7 +1275,7 @@
                 <a:ea typeface="Yu Gothic UI Semibold" pitchFamily="34" charset="-122"/>
                 <a:cs typeface="Yu Gothic UI Semibold" pitchFamily="34" charset="-120"/>
               </a:rPr>
-              <a:t>演習1 情報設計シートを作る (先に紙で設計) — 解答・指導ポイント</a:t>
+              <a:t>演習1 設計テンプレを "考え方" と Geminiで埋める — 解答・指導ポイント</a:t>
             </a:r>
             <a:endParaRPr lang="en-US" sz="2600" dirty="0"/>
           </a:p>
@@ -1442,176 +1442,127 @@
                 <a:ea typeface="Yu Gothic UI" pitchFamily="34" charset="-122"/>
                 <a:cs typeface="Yu Gothic UI" pitchFamily="34" charset="-120"/>
               </a:rPr>
-              <a:t>【貼り付け用】</a:t>
-            </a:r>
-            <a:endParaRPr lang="en-US" sz="1400" dirty="0"/>
-          </a:p>
-          <a:p>
-            <a:pPr indent="0" marL="0">
-              <a:spcAft>
-                <a:spcPts val="400"/>
-              </a:spcAft>
-              <a:buNone/>
-            </a:pPr>
-            <a:r>
-              <a:rPr lang="en-US" sz="1400" dirty="0">
-                <a:solidFill>
-                  <a:srgbClr val="1A1A1A"/>
-                </a:solidFill>
-                <a:latin typeface="Yu Gothic UI" pitchFamily="34" charset="0"/>
-                <a:ea typeface="Yu Gothic UI" pitchFamily="34" charset="-122"/>
-                <a:cs typeface="Yu Gothic UI" pitchFamily="34" charset="-120"/>
-              </a:rPr>
-              <a:t>お金初心者向けの有益情報を配信するための「情報設計シート」を作ってください。</a:t>
-            </a:r>
-            <a:endParaRPr lang="en-US" sz="1400" dirty="0"/>
-          </a:p>
-          <a:p>
-            <a:pPr indent="0" marL="0">
-              <a:spcAft>
-                <a:spcPts val="400"/>
-              </a:spcAft>
-              <a:buNone/>
-            </a:pPr>
-            <a:r>
-              <a:rPr lang="en-US" sz="1400" dirty="0">
-                <a:solidFill>
-                  <a:srgbClr val="1A1A1A"/>
-                </a:solidFill>
-                <a:latin typeface="Yu Gothic UI" pitchFamily="34" charset="0"/>
-                <a:ea typeface="Yu Gothic UI" pitchFamily="34" charset="-122"/>
-                <a:cs typeface="Yu Gothic UI" pitchFamily="34" charset="-120"/>
-              </a:rPr>
-              <a:t>内容:</a:t>
-            </a:r>
-            <a:endParaRPr lang="en-US" sz="1400" dirty="0"/>
-          </a:p>
-          <a:p>
-            <a:pPr indent="0" marL="0">
-              <a:spcAft>
-                <a:spcPts val="400"/>
-              </a:spcAft>
-              <a:buNone/>
-            </a:pPr>
-            <a:r>
-              <a:rPr lang="en-US" sz="1400" dirty="0">
-                <a:solidFill>
-                  <a:srgbClr val="1A1A1A"/>
-                </a:solidFill>
-                <a:latin typeface="Yu Gothic UI" pitchFamily="34" charset="0"/>
-                <a:ea typeface="Yu Gothic UI" pitchFamily="34" charset="-122"/>
-                <a:cs typeface="Yu Gothic UI" pitchFamily="34" charset="-120"/>
-              </a:rPr>
-              <a:t>(1) ターゲット読者像 (お金の知識に自信がない30〜50代)</a:t>
-            </a:r>
-            <a:endParaRPr lang="en-US" sz="1400" dirty="0"/>
-          </a:p>
-          <a:p>
-            <a:pPr indent="0" marL="0">
-              <a:spcAft>
-                <a:spcPts val="400"/>
-              </a:spcAft>
-              <a:buNone/>
-            </a:pPr>
-            <a:r>
-              <a:rPr lang="en-US" sz="1400" dirty="0">
-                <a:solidFill>
-                  <a:srgbClr val="1A1A1A"/>
-                </a:solidFill>
-                <a:latin typeface="Yu Gothic UI" pitchFamily="34" charset="0"/>
-                <a:ea typeface="Yu Gothic UI" pitchFamily="34" charset="-122"/>
-                <a:cs typeface="Yu Gothic UI" pitchFamily="34" charset="-120"/>
-              </a:rPr>
-              <a:t>(2) カテゴリ4つ (助成金/税金/株為替/お金の豆知識)</a:t>
-            </a:r>
-            <a:endParaRPr lang="en-US" sz="1400" dirty="0"/>
-          </a:p>
-          <a:p>
-            <a:pPr indent="0" marL="0">
-              <a:spcAft>
-                <a:spcPts val="400"/>
-              </a:spcAft>
-              <a:buNone/>
-            </a:pPr>
-            <a:r>
-              <a:rPr lang="en-US" sz="1400" dirty="0">
-                <a:solidFill>
-                  <a:srgbClr val="1A1A1A"/>
-                </a:solidFill>
-                <a:latin typeface="Yu Gothic UI" pitchFamily="34" charset="0"/>
-                <a:ea typeface="Yu Gothic UI" pitchFamily="34" charset="-122"/>
-                <a:cs typeface="Yu Gothic UI" pitchFamily="34" charset="-120"/>
-              </a:rPr>
-              <a:t>(3) 情報源ホワイトリスト10サイト (公的機関中心、個別助言せず一般情報のみ)</a:t>
-            </a:r>
-            <a:endParaRPr lang="en-US" sz="1400" dirty="0"/>
-          </a:p>
-          <a:p>
-            <a:pPr indent="0" marL="0">
-              <a:spcAft>
-                <a:spcPts val="400"/>
-              </a:spcAft>
-              <a:buNone/>
-            </a:pPr>
-            <a:r>
-              <a:rPr lang="en-US" sz="1400" dirty="0">
-                <a:solidFill>
-                  <a:srgbClr val="1A1A1A"/>
-                </a:solidFill>
-                <a:latin typeface="Yu Gothic UI" pitchFamily="34" charset="0"/>
-                <a:ea typeface="Yu Gothic UI" pitchFamily="34" charset="-122"/>
-                <a:cs typeface="Yu Gothic UI" pitchFamily="34" charset="-120"/>
-              </a:rPr>
-              <a:t>   例: 国税庁 nta.go.jp / 金融庁 fsa.go.jp / 中小企業庁 chusho.meti.go.jp / 厚労省 mhlw.go.jp</a:t>
-            </a:r>
-            <a:endParaRPr lang="en-US" sz="1400" dirty="0"/>
-          </a:p>
-          <a:p>
-            <a:pPr indent="0" marL="0">
-              <a:spcAft>
-                <a:spcPts val="400"/>
-              </a:spcAft>
-              <a:buNone/>
-            </a:pPr>
-            <a:r>
-              <a:rPr lang="en-US" sz="1400" dirty="0">
-                <a:solidFill>
-                  <a:srgbClr val="1A1A1A"/>
-                </a:solidFill>
-                <a:latin typeface="Yu Gothic UI" pitchFamily="34" charset="0"/>
-                <a:ea typeface="Yu Gothic UI" pitchFamily="34" charset="-122"/>
-                <a:cs typeface="Yu Gothic UI" pitchFamily="34" charset="-120"/>
-              </a:rPr>
-              <a:t>(4) 配信フォーマット (タイトル20字以内/本文300字以内/絵文字+改行/出典URL必須)</a:t>
-            </a:r>
-            <a:endParaRPr lang="en-US" sz="1400" dirty="0"/>
-          </a:p>
-          <a:p>
-            <a:pPr indent="0" marL="0">
-              <a:spcAft>
-                <a:spcPts val="400"/>
-              </a:spcAft>
-              <a:buNone/>
-            </a:pPr>
-            <a:endParaRPr lang="en-US" sz="1400" dirty="0"/>
-          </a:p>
-          <a:p>
-            <a:pPr indent="0" marL="0">
-              <a:spcAft>
-                <a:spcPts val="400"/>
-              </a:spcAft>
-              <a:buNone/>
-            </a:pPr>
-            <a:r>
-              <a:rPr lang="en-US" sz="1400" dirty="0">
-                <a:solidFill>
-                  <a:srgbClr val="1A1A1A"/>
-                </a:solidFill>
-                <a:latin typeface="Yu Gothic UI" pitchFamily="34" charset="0"/>
-                <a:ea typeface="Yu Gothic UI" pitchFamily="34" charset="-122"/>
-                <a:cs typeface="Yu Gothic UI" pitchFamily="34" charset="-120"/>
-              </a:rPr>
-              <a:t>各項目に「なぜこの設計にするか」の理由も必ず添えてください。</a:t>
+              <a:t>【生徒がGeminiに相談する例】</a:t>
+            </a:r>
+            <a:endParaRPr lang="en-US" sz="1400" dirty="0"/>
+          </a:p>
+          <a:p>
+            <a:pPr indent="0" marL="0">
+              <a:spcAft>
+                <a:spcPts val="400"/>
+              </a:spcAft>
+              <a:buNone/>
+            </a:pPr>
+            <a:r>
+              <a:rPr lang="en-US" sz="1400" dirty="0">
+                <a:solidFill>
+                  <a:srgbClr val="1A1A1A"/>
+                </a:solidFill>
+                <a:latin typeface="Yu Gothic UI" pitchFamily="34" charset="0"/>
+                <a:ea typeface="Yu Gothic UI" pitchFamily="34" charset="-122"/>
+                <a:cs typeface="Yu Gothic UI" pitchFamily="34" charset="-120"/>
+              </a:rPr>
+              <a:t>(1)「私は保険営業で、LINE配信は週1回を予定。ターゲットは30-50代のお金初心者です。</a:t>
+            </a:r>
+            <a:endParaRPr lang="en-US" sz="1400" dirty="0"/>
+          </a:p>
+          <a:p>
+            <a:pPr indent="0" marL="0">
+              <a:spcAft>
+                <a:spcPts val="400"/>
+              </a:spcAft>
+              <a:buNone/>
+            </a:pPr>
+            <a:r>
+              <a:rPr lang="en-US" sz="1400" dirty="0">
+                <a:solidFill>
+                  <a:srgbClr val="1A1A1A"/>
+                </a:solidFill>
+                <a:latin typeface="Yu Gothic UI" pitchFamily="34" charset="0"/>
+                <a:ea typeface="Yu Gothic UI" pitchFamily="34" charset="-122"/>
+                <a:cs typeface="Yu Gothic UI" pitchFamily="34" charset="-120"/>
+              </a:rPr>
+              <a:t>   このとき、配信フォーマットの "タイトル文字数" を何字にするか判断基準を教えて」</a:t>
+            </a:r>
+            <a:endParaRPr lang="en-US" sz="1400" dirty="0"/>
+          </a:p>
+          <a:p>
+            <a:pPr indent="0" marL="0">
+              <a:spcAft>
+                <a:spcPts val="400"/>
+              </a:spcAft>
+              <a:buNone/>
+            </a:pPr>
+            <a:r>
+              <a:rPr lang="en-US" sz="1400" dirty="0">
+                <a:solidFill>
+                  <a:srgbClr val="1A1A1A"/>
+                </a:solidFill>
+                <a:latin typeface="Yu Gothic UI" pitchFamily="34" charset="0"/>
+                <a:ea typeface="Yu Gothic UI" pitchFamily="34" charset="-122"/>
+                <a:cs typeface="Yu Gothic UI" pitchFamily="34" charset="-120"/>
+              </a:rPr>
+              <a:t>(2)「情報源ホワイトリストで、私の運用に必要そうな公的機関を、</a:t>
+            </a:r>
+            <a:endParaRPr lang="en-US" sz="1400" dirty="0"/>
+          </a:p>
+          <a:p>
+            <a:pPr indent="0" marL="0">
+              <a:spcAft>
+                <a:spcPts val="400"/>
+              </a:spcAft>
+              <a:buNone/>
+            </a:pPr>
+            <a:r>
+              <a:rPr lang="en-US" sz="1400" dirty="0">
+                <a:solidFill>
+                  <a:srgbClr val="1A1A1A"/>
+                </a:solidFill>
+                <a:latin typeface="Yu Gothic UI" pitchFamily="34" charset="0"/>
+                <a:ea typeface="Yu Gothic UI" pitchFamily="34" charset="-122"/>
+                <a:cs typeface="Yu Gothic UI" pitchFamily="34" charset="-120"/>
+              </a:rPr>
+              <a:t>   優先度順に5サイト挙げてください。理由も添えて」</a:t>
+            </a:r>
+            <a:endParaRPr lang="en-US" sz="1400" dirty="0"/>
+          </a:p>
+          <a:p>
+            <a:pPr indent="0" marL="0">
+              <a:spcAft>
+                <a:spcPts val="400"/>
+              </a:spcAft>
+              <a:buNone/>
+            </a:pPr>
+            <a:r>
+              <a:rPr lang="en-US" sz="1400" dirty="0">
+                <a:solidFill>
+                  <a:srgbClr val="1A1A1A"/>
+                </a:solidFill>
+                <a:latin typeface="Yu Gothic UI" pitchFamily="34" charset="0"/>
+                <a:ea typeface="Yu Gothic UI" pitchFamily="34" charset="-122"/>
+                <a:cs typeface="Yu Gothic UI" pitchFamily="34" charset="-120"/>
+              </a:rPr>
+              <a:t>(3)「配信頻度を週1回にするか週2回にするか迷っています。</a:t>
+            </a:r>
+            <a:endParaRPr lang="en-US" sz="1400" dirty="0"/>
+          </a:p>
+          <a:p>
+            <a:pPr indent="0" marL="0">
+              <a:spcAft>
+                <a:spcPts val="400"/>
+              </a:spcAft>
+              <a:buNone/>
+            </a:pPr>
+            <a:r>
+              <a:rPr lang="en-US" sz="1400" dirty="0">
+                <a:solidFill>
+                  <a:srgbClr val="1A1A1A"/>
+                </a:solidFill>
+                <a:latin typeface="Yu Gothic UI" pitchFamily="34" charset="0"/>
+                <a:ea typeface="Yu Gothic UI" pitchFamily="34" charset="-122"/>
+                <a:cs typeface="Yu Gothic UI" pitchFamily="34" charset="-120"/>
+              </a:rPr>
+              <a:t>   継続しやすさの観点で、私の状況ならどちら?」</a:t>
             </a:r>
             <a:endParaRPr lang="en-US" sz="1400" dirty="0"/>
           </a:p>
@@ -1739,47 +1690,47 @@
                 <a:ea typeface="Yu Gothic UI" pitchFamily="34" charset="-122"/>
                 <a:cs typeface="Yu Gothic UI" pitchFamily="34" charset="-120"/>
               </a:rPr>
-              <a:t>・情報設計シート (ターゲット/カテゴリ/ホワイトリスト/フォーマット の4ブロック)</a:t>
-            </a:r>
-            <a:endParaRPr lang="en-US" sz="1400" dirty="0"/>
-          </a:p>
-          <a:p>
-            <a:pPr indent="0" marL="0">
-              <a:spcAft>
-                <a:spcPts val="400"/>
-              </a:spcAft>
-              <a:buNone/>
-            </a:pPr>
-            <a:r>
-              <a:rPr lang="en-US" sz="1400" dirty="0">
-                <a:solidFill>
-                  <a:srgbClr val="1A1A1A"/>
-                </a:solidFill>
-                <a:latin typeface="Yu Gothic UI" pitchFamily="34" charset="0"/>
-                <a:ea typeface="Yu Gothic UI" pitchFamily="34" charset="-122"/>
-                <a:cs typeface="Yu Gothic UI" pitchFamily="34" charset="-120"/>
-              </a:rPr>
-              <a:t>・各項目に "なぜそうするか" の一文</a:t>
-            </a:r>
-            <a:endParaRPr lang="en-US" sz="1400" dirty="0"/>
-          </a:p>
-          <a:p>
-            <a:pPr indent="0" marL="0">
-              <a:spcAft>
-                <a:spcPts val="400"/>
-              </a:spcAft>
-              <a:buNone/>
-            </a:pPr>
-            <a:r>
-              <a:rPr lang="en-US" sz="1400" dirty="0">
-                <a:solidFill>
-                  <a:srgbClr val="1A1A1A"/>
-                </a:solidFill>
-                <a:latin typeface="Yu Gothic UI" pitchFamily="34" charset="0"/>
-                <a:ea typeface="Yu Gothic UI" pitchFamily="34" charset="-122"/>
-                <a:cs typeface="Yu Gothic UI" pitchFamily="34" charset="-120"/>
-              </a:rPr>
-              <a:t>・スプシに「情報設計」「情報源マスター」の2シートで保存</a:t>
+              <a:t>・情報設計テンプレの各項目に "自分の運用に合った答え" が入っている</a:t>
+            </a:r>
+            <a:endParaRPr lang="en-US" sz="1400" dirty="0"/>
+          </a:p>
+          <a:p>
+            <a:pPr indent="0" marL="0">
+              <a:spcAft>
+                <a:spcPts val="400"/>
+              </a:spcAft>
+              <a:buNone/>
+            </a:pPr>
+            <a:r>
+              <a:rPr lang="en-US" sz="1400" dirty="0">
+                <a:solidFill>
+                  <a:srgbClr val="1A1A1A"/>
+                </a:solidFill>
+                <a:latin typeface="Yu Gothic UI" pitchFamily="34" charset="0"/>
+                <a:ea typeface="Yu Gothic UI" pitchFamily="34" charset="-122"/>
+                <a:cs typeface="Yu Gothic UI" pitchFamily="34" charset="-120"/>
+              </a:rPr>
+              <a:t>・各答えの理由を口頭で説明できる (「考え方」列を理解している)</a:t>
+            </a:r>
+            <a:endParaRPr lang="en-US" sz="1400" dirty="0"/>
+          </a:p>
+          <a:p>
+            <a:pPr indent="0" marL="0">
+              <a:spcAft>
+                <a:spcPts val="400"/>
+              </a:spcAft>
+              <a:buNone/>
+            </a:pPr>
+            <a:r>
+              <a:rPr lang="en-US" sz="1400" dirty="0">
+                <a:solidFill>
+                  <a:srgbClr val="1A1A1A"/>
+                </a:solidFill>
+                <a:latin typeface="Yu Gothic UI" pitchFamily="34" charset="0"/>
+                <a:ea typeface="Yu Gothic UI" pitchFamily="34" charset="-122"/>
+                <a:cs typeface="Yu Gothic UI" pitchFamily="34" charset="-120"/>
+              </a:rPr>
+              <a:t>・情報源マスターも自分用に整えた (テンプレ10から必要な数に絞る等)</a:t>
             </a:r>
             <a:endParaRPr lang="en-US" sz="1400" dirty="0"/>
           </a:p>
@@ -1907,47 +1858,67 @@
                 <a:ea typeface="Yu Gothic UI" pitchFamily="34" charset="-122"/>
                 <a:cs typeface="Yu Gothic UI" pitchFamily="34" charset="-120"/>
               </a:rPr>
-              <a:t>・「なぜ設計するのか」を必ず口頭で説明させる。コード書く前が最重要。</a:t>
-            </a:r>
-            <a:endParaRPr lang="en-US" sz="1400" dirty="0"/>
-          </a:p>
-          <a:p>
-            <a:pPr indent="0" marL="0">
-              <a:spcAft>
-                <a:spcPts val="400"/>
-              </a:spcAft>
-              <a:buNone/>
-            </a:pPr>
-            <a:r>
-              <a:rPr lang="en-US" sz="1400" dirty="0">
-                <a:solidFill>
-                  <a:srgbClr val="1A1A1A"/>
-                </a:solidFill>
-                <a:latin typeface="Yu Gothic UI" pitchFamily="34" charset="0"/>
-                <a:ea typeface="Yu Gothic UI" pitchFamily="34" charset="-122"/>
-                <a:cs typeface="Yu Gothic UI" pitchFamily="34" charset="-120"/>
-              </a:rPr>
-              <a:t>・ホワイトリストに個人ブログを入れる生徒が出る。「アフィ広告のあるサイト = 対象外」を強調。</a:t>
-            </a:r>
-            <a:endParaRPr lang="en-US" sz="1400" dirty="0"/>
-          </a:p>
-          <a:p>
-            <a:pPr indent="0" marL="0">
-              <a:spcAft>
-                <a:spcPts val="400"/>
-              </a:spcAft>
-              <a:buNone/>
-            </a:pPr>
-            <a:r>
-              <a:rPr lang="en-US" sz="1400" dirty="0">
-                <a:solidFill>
-                  <a:srgbClr val="1A1A1A"/>
-                </a:solidFill>
-                <a:latin typeface="Yu Gothic UI" pitchFamily="34" charset="0"/>
-                <a:ea typeface="Yu Gothic UI" pitchFamily="34" charset="-122"/>
-                <a:cs typeface="Yu Gothic UI" pitchFamily="34" charset="-120"/>
-              </a:rPr>
-              <a:t>・「個別助言(税務相談・投資助言)はしない」と明記。金融商品取引法の意識を持たせる。</a:t>
+              <a:t>・「テンプレの例そのまま」で終わる生徒に注意。「あなたの運用ではどう?」と個別に問う。</a:t>
+            </a:r>
+            <a:endParaRPr lang="en-US" sz="1400" dirty="0"/>
+          </a:p>
+          <a:p>
+            <a:pPr indent="0" marL="0">
+              <a:spcAft>
+                <a:spcPts val="400"/>
+              </a:spcAft>
+              <a:buNone/>
+            </a:pPr>
+            <a:r>
+              <a:rPr lang="en-US" sz="1400" dirty="0">
+                <a:solidFill>
+                  <a:srgbClr val="1A1A1A"/>
+                </a:solidFill>
+                <a:latin typeface="Yu Gothic UI" pitchFamily="34" charset="0"/>
+                <a:ea typeface="Yu Gothic UI" pitchFamily="34" charset="-122"/>
+                <a:cs typeface="Yu Gothic UI" pitchFamily="34" charset="-120"/>
+              </a:rPr>
+              <a:t>・Gemini に相談することが目的ではない。相談→自分で判断→スプシに書く の流れを守らせる。</a:t>
+            </a:r>
+            <a:endParaRPr lang="en-US" sz="1400" dirty="0"/>
+          </a:p>
+          <a:p>
+            <a:pPr indent="0" marL="0">
+              <a:spcAft>
+                <a:spcPts val="400"/>
+              </a:spcAft>
+              <a:buNone/>
+            </a:pPr>
+            <a:r>
+              <a:rPr lang="en-US" sz="1400" dirty="0">
+                <a:solidFill>
+                  <a:srgbClr val="1A1A1A"/>
+                </a:solidFill>
+                <a:latin typeface="Yu Gothic UI" pitchFamily="34" charset="0"/>
+                <a:ea typeface="Yu Gothic UI" pitchFamily="34" charset="-122"/>
+                <a:cs typeface="Yu Gothic UI" pitchFamily="34" charset="-120"/>
+              </a:rPr>
+              <a:t>・答えられない項目は空欄OK。100点を目指させない、演習2 で気付いたら戻ればよい。</a:t>
+            </a:r>
+            <a:endParaRPr lang="en-US" sz="1400" dirty="0"/>
+          </a:p>
+          <a:p>
+            <a:pPr indent="0" marL="0">
+              <a:spcAft>
+                <a:spcPts val="400"/>
+              </a:spcAft>
+              <a:buNone/>
+            </a:pPr>
+            <a:r>
+              <a:rPr lang="en-US" sz="1400" dirty="0">
+                <a:solidFill>
+                  <a:srgbClr val="1A1A1A"/>
+                </a:solidFill>
+                <a:latin typeface="Yu Gothic UI" pitchFamily="34" charset="0"/>
+                <a:ea typeface="Yu Gothic UI" pitchFamily="34" charset="-122"/>
+                <a:cs typeface="Yu Gothic UI" pitchFamily="34" charset="-120"/>
+              </a:rPr>
+              <a:t>・「アフィリエイト広告のあるサイト = 対象外」「個別助言(税務・投資)はしない」の2点は必ず口頭確認。</a:t>
             </a:r>
             <a:endParaRPr lang="en-US" sz="1400" dirty="0"/>
           </a:p>
